--- a/hw2/Selection_via_proxy.pptx
+++ b/hw2/Selection_via_proxy.pptx
@@ -8329,7 +8329,7 @@
               </a:lnSpc>
             </a:pPr>
             <a:r>
-              <a:rPr lang="ru-RU" sz="2800" b="1" dirty="0">
+              <a:rPr lang="ru-RU" sz="3600" b="1" dirty="0">
                 <a:solidFill>
                   <a:srgbClr val="000000"/>
                 </a:solidFill>
@@ -8340,7 +8340,7 @@
               <a:t>Как работает </a:t>
             </a:r>
             <a:r>
-              <a:rPr lang="en-US" sz="2800" b="1" dirty="0">
+              <a:rPr lang="en-US" sz="3600" b="1" dirty="0">
                 <a:solidFill>
                   <a:srgbClr val="000000"/>
                 </a:solidFill>
@@ -8351,7 +8351,7 @@
               <a:t>SVP</a:t>
             </a:r>
             <a:r>
-              <a:rPr lang="ru-RU" sz="2800" b="1" dirty="0">
+              <a:rPr lang="ru-RU" sz="3600" b="1" dirty="0">
                 <a:solidFill>
                   <a:srgbClr val="000000"/>
                 </a:solidFill>
@@ -8361,7 +8361,7 @@
               </a:rPr>
               <a:t>?</a:t>
             </a:r>
-            <a:endParaRPr lang="en-US" sz="2800" dirty="0">
+            <a:endParaRPr lang="en-US" sz="3600" dirty="0">
               <a:latin typeface="Arial" panose="020B0604020202020204" pitchFamily="34" charset="0"/>
               <a:cs typeface="Arial" panose="020B0604020202020204" pitchFamily="34" charset="0"/>
             </a:endParaRPr>
